--- a/spirithaus/packaging/dist/spirithaus-box-label-artwork-A4-landscape.pptx
+++ b/spirithaus/packaging/dist/spirithaus-box-label-artwork-A4-landscape.pptx
@@ -2696,7 +2696,85 @@
         </p:nvSpPr>
         <p:spPr>
           <a:xfrm>
-            <a:off x="8028000" y="6408000"/>
+            <a:off x="7308000" y="6390000"/>
+            <a:ext cx="2808000" cy="144000"/>
+          </a:xfrm>
+          <a:prstGeom prst="rect">
+            <a:avLst/>
+          </a:prstGeom>
+          <a:noFill/>
+          <a:ln/>
+        </p:spPr>
+        <p:txBody>
+          <a:bodyPr wrap="square" lIns="0" tIns="0" rIns="0" bIns="0" rtlCol="0" anchor="ctr"/>
+          <a:lstStyle/>
+          <a:p>
+            <a:pPr algn="r" indent="0" marL="0">
+              <a:buNone/>
+            </a:pPr>
+            <a:r>
+              <a:rPr lang="en-US" sz="600" spc="110" kern="0" dirty="0">
+                <a:solidFill>
+                  <a:srgbClr val="B3B1AC"/>
+                </a:solidFill>
+                <a:latin typeface="Space Mono" pitchFamily="34" charset="0"/>
+                <a:ea typeface="Space Mono" pitchFamily="34" charset="-122"/>
+                <a:cs typeface="Space Mono" pitchFamily="34" charset="-120"/>
+              </a:rPr>
+              <a:t>PACKAGED LIQUOR LICENCE (NSW)</a:t>
+            </a:r>
+            <a:endParaRPr lang="en-US" sz="600" dirty="0"/>
+          </a:p>
+        </p:txBody>
+      </p:sp>
+      <p:sp>
+        <p:nvSpPr>
+          <p:cNvPr id="51" name="Text 43"/>
+          <p:cNvSpPr txBox="1"/>
+          <p:nvPr/>
+        </p:nvSpPr>
+        <p:spPr>
+          <a:xfrm>
+            <a:off x="7308000" y="6523200"/>
+            <a:ext cx="2808000" cy="180000"/>
+          </a:xfrm>
+          <a:prstGeom prst="rect">
+            <a:avLst/>
+          </a:prstGeom>
+          <a:noFill/>
+          <a:ln/>
+        </p:spPr>
+        <p:txBody>
+          <a:bodyPr wrap="square" lIns="0" tIns="0" rIns="0" bIns="0" rtlCol="0" anchor="ctr"/>
+          <a:lstStyle/>
+          <a:p>
+            <a:pPr algn="r" indent="0" marL="0">
+              <a:buNone/>
+            </a:pPr>
+            <a:r>
+              <a:rPr lang="en-US" sz="910" b="1" spc="90" kern="0" dirty="0">
+                <a:solidFill>
+                  <a:srgbClr val="F2EFE9"/>
+                </a:solidFill>
+                <a:latin typeface="Space Mono" pitchFamily="34" charset="0"/>
+                <a:ea typeface="Space Mono" pitchFamily="34" charset="-122"/>
+                <a:cs typeface="Space Mono" pitchFamily="34" charset="-120"/>
+              </a:rPr>
+              <a:t>LIQP700301260</a:t>
+            </a:r>
+            <a:endParaRPr lang="en-US" sz="910" dirty="0"/>
+          </a:p>
+        </p:txBody>
+      </p:sp>
+      <p:sp>
+        <p:nvSpPr>
+          <p:cNvPr id="52" name="Text 44"/>
+          <p:cNvSpPr txBox="1"/>
+          <p:nvPr/>
+        </p:nvSpPr>
+        <p:spPr>
+          <a:xfrm>
+            <a:off x="8028000" y="6840000"/>
             <a:ext cx="1080000" cy="144000"/>
           </a:xfrm>
           <a:prstGeom prst="rect">
@@ -2721,7 +2799,7 @@
                 <a:ea typeface="Space Mono" pitchFamily="34" charset="-122"/>
                 <a:cs typeface="Space Mono" pitchFamily="34" charset="-120"/>
               </a:rPr>
-              <a:t>LICENCE No.</a:t>
+              <a:t>ABN</a:t>
             </a:r>
             <a:endParaRPr lang="en-US" sz="650" dirty="0"/>
           </a:p>
@@ -2729,13 +2807,13 @@
       </p:sp>
       <p:sp>
         <p:nvSpPr>
-          <p:cNvPr id="51" name="Shape 43"/>
+          <p:cNvPr id="53" name="Shape 45"/>
           <p:cNvSpPr/>
           <p:nvPr/>
         </p:nvSpPr>
         <p:spPr>
           <a:xfrm>
-            <a:off x="9180000" y="6530400"/>
+            <a:off x="9180000" y="6962400"/>
             <a:ext cx="936000" cy="0"/>
           </a:xfrm>
           <a:prstGeom prst="line">
@@ -2752,75 +2830,13 @@
       </p:sp>
       <p:sp>
         <p:nvSpPr>
-          <p:cNvPr id="52" name="Text 44"/>
-          <p:cNvSpPr txBox="1"/>
-          <p:nvPr/>
-        </p:nvSpPr>
-        <p:spPr>
-          <a:xfrm>
-            <a:off x="8028000" y="6606000"/>
-            <a:ext cx="1080000" cy="144000"/>
-          </a:xfrm>
-          <a:prstGeom prst="rect">
-            <a:avLst/>
-          </a:prstGeom>
-          <a:noFill/>
-          <a:ln/>
-        </p:spPr>
-        <p:txBody>
-          <a:bodyPr wrap="square" lIns="0" tIns="0" rIns="0" bIns="0" rtlCol="0" anchor="ctr"/>
-          <a:lstStyle/>
-          <a:p>
-            <a:pPr algn="r" indent="0" marL="0">
-              <a:buNone/>
-            </a:pPr>
-            <a:r>
-              <a:rPr lang="en-US" sz="650" spc="80" kern="0" dirty="0">
-                <a:solidFill>
-                  <a:srgbClr val="B3B1AC"/>
-                </a:solidFill>
-                <a:latin typeface="Space Mono" pitchFamily="34" charset="0"/>
-                <a:ea typeface="Space Mono" pitchFamily="34" charset="-122"/>
-                <a:cs typeface="Space Mono" pitchFamily="34" charset="-120"/>
-              </a:rPr>
-              <a:t>ABN</a:t>
-            </a:r>
-            <a:endParaRPr lang="en-US" sz="650" dirty="0"/>
-          </a:p>
-        </p:txBody>
-      </p:sp>
-      <p:sp>
-        <p:nvSpPr>
-          <p:cNvPr id="53" name="Shape 45"/>
-          <p:cNvSpPr/>
-          <p:nvPr/>
-        </p:nvSpPr>
-        <p:spPr>
-          <a:xfrm>
-            <a:off x="9180000" y="6728400"/>
-            <a:ext cx="936000" cy="0"/>
-          </a:xfrm>
-          <a:prstGeom prst="line">
-            <a:avLst/>
-          </a:prstGeom>
-          <a:noFill/>
-          <a:ln w="11430">
-            <a:solidFill>
-              <a:srgbClr val="767572"/>
-            </a:solidFill>
-            <a:prstDash val="solid"/>
-          </a:ln>
-        </p:spPr>
-      </p:sp>
-      <p:sp>
-        <p:nvSpPr>
           <p:cNvPr id="54" name="Text 46"/>
           <p:cNvSpPr txBox="1"/>
           <p:nvPr/>
         </p:nvSpPr>
         <p:spPr>
           <a:xfrm>
-            <a:off x="8028000" y="6804000"/>
+            <a:off x="8028000" y="7038000"/>
             <a:ext cx="1080000" cy="144000"/>
           </a:xfrm>
           <a:prstGeom prst="rect">
@@ -2859,7 +2875,7 @@
         </p:nvSpPr>
         <p:spPr>
           <a:xfrm>
-            <a:off x="9180000" y="6926400"/>
+            <a:off x="9180000" y="7160400"/>
             <a:ext cx="936000" cy="0"/>
           </a:xfrm>
           <a:prstGeom prst="line">
@@ -4452,7 +4468,85 @@
         </p:nvSpPr>
         <p:spPr>
           <a:xfrm>
-            <a:off x="8028000" y="6408000"/>
+            <a:off x="7308000" y="6390000"/>
+            <a:ext cx="2808000" cy="144000"/>
+          </a:xfrm>
+          <a:prstGeom prst="rect">
+            <a:avLst/>
+          </a:prstGeom>
+          <a:noFill/>
+          <a:ln/>
+        </p:spPr>
+        <p:txBody>
+          <a:bodyPr wrap="square" lIns="0" tIns="0" rIns="0" bIns="0" rtlCol="0" anchor="ctr"/>
+          <a:lstStyle/>
+          <a:p>
+            <a:pPr algn="r" indent="0" marL="0">
+              <a:buNone/>
+            </a:pPr>
+            <a:r>
+              <a:rPr lang="en-US" sz="600" spc="110" kern="0" dirty="0">
+                <a:solidFill>
+                  <a:srgbClr val="504F4D"/>
+                </a:solidFill>
+                <a:latin typeface="Space Mono" pitchFamily="34" charset="0"/>
+                <a:ea typeface="Space Mono" pitchFamily="34" charset="-122"/>
+                <a:cs typeface="Space Mono" pitchFamily="34" charset="-120"/>
+              </a:rPr>
+              <a:t>PACKAGED LIQUOR LICENCE (NSW)</a:t>
+            </a:r>
+            <a:endParaRPr lang="en-US" sz="600" dirty="0"/>
+          </a:p>
+        </p:txBody>
+      </p:sp>
+      <p:sp>
+        <p:nvSpPr>
+          <p:cNvPr id="51" name="Text 43"/>
+          <p:cNvSpPr txBox="1"/>
+          <p:nvPr/>
+        </p:nvSpPr>
+        <p:spPr>
+          <a:xfrm>
+            <a:off x="7308000" y="6523200"/>
+            <a:ext cx="2808000" cy="180000"/>
+          </a:xfrm>
+          <a:prstGeom prst="rect">
+            <a:avLst/>
+          </a:prstGeom>
+          <a:noFill/>
+          <a:ln/>
+        </p:spPr>
+        <p:txBody>
+          <a:bodyPr wrap="square" lIns="0" tIns="0" rIns="0" bIns="0" rtlCol="0" anchor="ctr"/>
+          <a:lstStyle/>
+          <a:p>
+            <a:pPr algn="r" indent="0" marL="0">
+              <a:buNone/>
+            </a:pPr>
+            <a:r>
+              <a:rPr lang="en-US" sz="910" b="1" spc="90" kern="0" dirty="0">
+                <a:solidFill>
+                  <a:srgbClr val="111110"/>
+                </a:solidFill>
+                <a:latin typeface="Space Mono" pitchFamily="34" charset="0"/>
+                <a:ea typeface="Space Mono" pitchFamily="34" charset="-122"/>
+                <a:cs typeface="Space Mono" pitchFamily="34" charset="-120"/>
+              </a:rPr>
+              <a:t>LIQP700301260</a:t>
+            </a:r>
+            <a:endParaRPr lang="en-US" sz="910" dirty="0"/>
+          </a:p>
+        </p:txBody>
+      </p:sp>
+      <p:sp>
+        <p:nvSpPr>
+          <p:cNvPr id="52" name="Text 44"/>
+          <p:cNvSpPr txBox="1"/>
+          <p:nvPr/>
+        </p:nvSpPr>
+        <p:spPr>
+          <a:xfrm>
+            <a:off x="8028000" y="6840000"/>
             <a:ext cx="1080000" cy="144000"/>
           </a:xfrm>
           <a:prstGeom prst="rect">
@@ -4477,7 +4571,7 @@
                 <a:ea typeface="Space Mono" pitchFamily="34" charset="-122"/>
                 <a:cs typeface="Space Mono" pitchFamily="34" charset="-120"/>
               </a:rPr>
-              <a:t>LICENCE No.</a:t>
+              <a:t>ABN</a:t>
             </a:r>
             <a:endParaRPr lang="en-US" sz="650" dirty="0"/>
           </a:p>
@@ -4485,13 +4579,13 @@
       </p:sp>
       <p:sp>
         <p:nvSpPr>
-          <p:cNvPr id="51" name="Shape 43"/>
+          <p:cNvPr id="53" name="Shape 45"/>
           <p:cNvSpPr/>
           <p:nvPr/>
         </p:nvSpPr>
         <p:spPr>
           <a:xfrm>
-            <a:off x="9180000" y="6530400"/>
+            <a:off x="9180000" y="6962400"/>
             <a:ext cx="936000" cy="0"/>
           </a:xfrm>
           <a:prstGeom prst="line">
@@ -4508,75 +4602,13 @@
       </p:sp>
       <p:sp>
         <p:nvSpPr>
-          <p:cNvPr id="52" name="Text 44"/>
-          <p:cNvSpPr txBox="1"/>
-          <p:nvPr/>
-        </p:nvSpPr>
-        <p:spPr>
-          <a:xfrm>
-            <a:off x="8028000" y="6606000"/>
-            <a:ext cx="1080000" cy="144000"/>
-          </a:xfrm>
-          <a:prstGeom prst="rect">
-            <a:avLst/>
-          </a:prstGeom>
-          <a:noFill/>
-          <a:ln/>
-        </p:spPr>
-        <p:txBody>
-          <a:bodyPr wrap="square" lIns="0" tIns="0" rIns="0" bIns="0" rtlCol="0" anchor="ctr"/>
-          <a:lstStyle/>
-          <a:p>
-            <a:pPr algn="r" indent="0" marL="0">
-              <a:buNone/>
-            </a:pPr>
-            <a:r>
-              <a:rPr lang="en-US" sz="650" spc="80" kern="0" dirty="0">
-                <a:solidFill>
-                  <a:srgbClr val="504F4D"/>
-                </a:solidFill>
-                <a:latin typeface="Space Mono" pitchFamily="34" charset="0"/>
-                <a:ea typeface="Space Mono" pitchFamily="34" charset="-122"/>
-                <a:cs typeface="Space Mono" pitchFamily="34" charset="-120"/>
-              </a:rPr>
-              <a:t>ABN</a:t>
-            </a:r>
-            <a:endParaRPr lang="en-US" sz="650" dirty="0"/>
-          </a:p>
-        </p:txBody>
-      </p:sp>
-      <p:sp>
-        <p:nvSpPr>
-          <p:cNvPr id="53" name="Shape 45"/>
-          <p:cNvSpPr/>
-          <p:nvPr/>
-        </p:nvSpPr>
-        <p:spPr>
-          <a:xfrm>
-            <a:off x="9180000" y="6728400"/>
-            <a:ext cx="936000" cy="0"/>
-          </a:xfrm>
-          <a:prstGeom prst="line">
-            <a:avLst/>
-          </a:prstGeom>
-          <a:noFill/>
-          <a:ln w="11430">
-            <a:solidFill>
-              <a:srgbClr val="8D8B87"/>
-            </a:solidFill>
-            <a:prstDash val="solid"/>
-          </a:ln>
-        </p:spPr>
-      </p:sp>
-      <p:sp>
-        <p:nvSpPr>
           <p:cNvPr id="54" name="Text 46"/>
           <p:cNvSpPr txBox="1"/>
           <p:nvPr/>
         </p:nvSpPr>
         <p:spPr>
           <a:xfrm>
-            <a:off x="8028000" y="6804000"/>
+            <a:off x="8028000" y="7038000"/>
             <a:ext cx="1080000" cy="144000"/>
           </a:xfrm>
           <a:prstGeom prst="rect">
@@ -4615,7 +4647,7 @@
         </p:nvSpPr>
         <p:spPr>
           <a:xfrm>
-            <a:off x="9180000" y="6926400"/>
+            <a:off x="9180000" y="7160400"/>
             <a:ext cx="936000" cy="0"/>
           </a:xfrm>
           <a:prstGeom prst="line">

--- a/spirithaus/packaging/dist/spirithaus-box-label-artwork-A4-landscape.pptx
+++ b/spirithaus/packaging/dist/spirithaus-box-label-artwork-A4-landscape.pptx
@@ -2581,7 +2581,7 @@
                 <a:ea typeface="Space Mono" pitchFamily="34" charset="-122"/>
                 <a:cs typeface="Space Mono" pitchFamily="34" charset="-120"/>
               </a:rPr>
-              <a:t>[PHONE]  ·  [EMAIL]</a:t>
+              <a:t>0452 480 487  ·  sales@spirithaus.com.au</a:t>
             </a:r>
             <a:endParaRPr lang="en-US" sz="680" dirty="0"/>
           </a:p>
@@ -4353,7 +4353,7 @@
                 <a:ea typeface="Space Mono" pitchFamily="34" charset="-122"/>
                 <a:cs typeface="Space Mono" pitchFamily="34" charset="-120"/>
               </a:rPr>
-              <a:t>[PHONE]  ·  [EMAIL]</a:t>
+              <a:t>0452 480 487  ·  sales@spirithaus.com.au</a:t>
             </a:r>
             <a:endParaRPr lang="en-US" sz="680" dirty="0"/>
           </a:p>

--- a/spirithaus/packaging/dist/spirithaus-box-label-artwork-A4-landscape.pptx
+++ b/spirithaus/packaging/dist/spirithaus-box-label-artwork-A4-landscape.pptx
@@ -507,7 +507,7 @@
               <a:rPr lang="en-US" dirty="0"/>
               <a:t>SPIRITHAUS A4 LANDSCAPE box label — bone. 297 x 210mm.
 Address panel left, order fields right, statutory notice across the footer.
-Replace [STREET ADDRESS] / [POSTCODE] / [PHONE] / [EMAIL]; confirm the Liquor
+Confirm the return-address block and the Liquor
 Act wording with your licensing advisor before printing.</a:t>
             </a:r>
             <a:endParaRPr lang="en-US" dirty="0"/>
@@ -598,7 +598,7 @@
               <a:rPr lang="en-US" dirty="0"/>
               <a:t>SPIRITHAUS A4 LANDSCAPE box label — ink. 297 x 210mm.
 Address panel left, order fields right, statutory notice across the footer.
-Replace [STREET ADDRESS] / [POSTCODE] / [PHONE] / [EMAIL]; confirm the Liquor
+Confirm the return-address block and the Liquor
 Act wording with your licensing advisor before printing.</a:t>
             </a:r>
             <a:endParaRPr lang="en-US" dirty="0"/>
@@ -1217,8 +1217,8 @@
         </p:blipFill>
         <p:spPr>
           <a:xfrm>
-            <a:off x="576000" y="489600"/>
-            <a:ext cx="3236400" cy="327600"/>
+            <a:off x="576000" y="432000"/>
+            <a:ext cx="4017600" cy="406800"/>
           </a:xfrm>
           <a:prstGeom prst="rect">
             <a:avLst/>
@@ -1233,8 +1233,8 @@
         </p:nvSpPr>
         <p:spPr>
           <a:xfrm>
-            <a:off x="576000" y="921600"/>
-            <a:ext cx="3960000" cy="180000"/>
+            <a:off x="576000" y="946800"/>
+            <a:ext cx="4320000" cy="180000"/>
           </a:xfrm>
           <a:prstGeom prst="rect">
             <a:avLst/>
@@ -2541,27 +2541,7 @@
                 <a:ea typeface="Space Mono" pitchFamily="34" charset="-122"/>
                 <a:cs typeface="Space Mono" pitchFamily="34" charset="-120"/>
               </a:rPr>
-              <a:t>[STREET ADDRESS]</a:t>
-            </a:r>
-            <a:endParaRPr lang="en-US" sz="680" dirty="0"/>
-          </a:p>
-          <a:p>
-            <a:pPr indent="0" marL="0">
-              <a:lnSpc>
-                <a:spcPct val="160000"/>
-              </a:lnSpc>
-              <a:buNone/>
-            </a:pPr>
-            <a:r>
-              <a:rPr lang="en-US" sz="680" spc="60" kern="0" dirty="0">
-                <a:solidFill>
-                  <a:srgbClr val="B3B1AC"/>
-                </a:solidFill>
-                <a:latin typeface="Space Mono" pitchFamily="34" charset="0"/>
-                <a:ea typeface="Space Mono" pitchFamily="34" charset="-122"/>
-                <a:cs typeface="Space Mono" pitchFamily="34" charset="-120"/>
-              </a:rPr>
-              <a:t>SYDNEY NSW [POSTCODE] AUSTRALIA</a:t>
+              <a:t>SYDNEY NSW AUSTRALIA</a:t>
             </a:r>
             <a:endParaRPr lang="en-US" sz="680" dirty="0"/>
           </a:p>
@@ -2989,8 +2969,8 @@
         </p:blipFill>
         <p:spPr>
           <a:xfrm>
-            <a:off x="576000" y="489600"/>
-            <a:ext cx="3236400" cy="327600"/>
+            <a:off x="576000" y="432000"/>
+            <a:ext cx="4017600" cy="406800"/>
           </a:xfrm>
           <a:prstGeom prst="rect">
             <a:avLst/>
@@ -3005,8 +2985,8 @@
         </p:nvSpPr>
         <p:spPr>
           <a:xfrm>
-            <a:off x="576000" y="921600"/>
-            <a:ext cx="3960000" cy="180000"/>
+            <a:off x="576000" y="946800"/>
+            <a:ext cx="4320000" cy="180000"/>
           </a:xfrm>
           <a:prstGeom prst="rect">
             <a:avLst/>
@@ -4313,27 +4293,7 @@
                 <a:ea typeface="Space Mono" pitchFamily="34" charset="-122"/>
                 <a:cs typeface="Space Mono" pitchFamily="34" charset="-120"/>
               </a:rPr>
-              <a:t>[STREET ADDRESS]</a:t>
-            </a:r>
-            <a:endParaRPr lang="en-US" sz="680" dirty="0"/>
-          </a:p>
-          <a:p>
-            <a:pPr indent="0" marL="0">
-              <a:lnSpc>
-                <a:spcPct val="160000"/>
-              </a:lnSpc>
-              <a:buNone/>
-            </a:pPr>
-            <a:r>
-              <a:rPr lang="en-US" sz="680" spc="60" kern="0" dirty="0">
-                <a:solidFill>
-                  <a:srgbClr val="504F4D"/>
-                </a:solidFill>
-                <a:latin typeface="Space Mono" pitchFamily="34" charset="0"/>
-                <a:ea typeface="Space Mono" pitchFamily="34" charset="-122"/>
-                <a:cs typeface="Space Mono" pitchFamily="34" charset="-120"/>
-              </a:rPr>
-              <a:t>SYDNEY NSW [POSTCODE] AUSTRALIA</a:t>
+              <a:t>SYDNEY NSW AUSTRALIA</a:t>
             </a:r>
             <a:endParaRPr lang="en-US" sz="680" dirty="0"/>
           </a:p>
